--- a/presentations/competition-2026/一球兩面_正式競賽版_40頁_評審閱讀優化_20261020.pptx
+++ b/presentations/competition-2026/一球兩面_正式競賽版_40頁_評審閱讀優化_20261020.pptx
@@ -3128,85 +3128,6 @@
           </p:txBody>
         </p:sp>
       </p:grpSp>
-      <p:grpSp>
-        <p:nvGrpSpPr>
-          <p:cNvPr id="33" name="takeaway"/>
-          <p:cNvGrpSpPr/>
-          <p:nvPr/>
-        </p:nvGrpSpPr>
-        <p:grpSpPr>
-          <a:xfrm>
-            <a:off x="609600" y="5734050"/>
-            <a:ext cx="10972800" cy="704850"/>
-            <a:chOff x="609600" y="5734050"/>
-            <a:chExt cx="10972800" cy="704850"/>
-          </a:xfrm>
-        </p:grpSpPr>
-        <p:sp>
-          <p:nvSpPr>
-            <p:cNvPr id="31" name="Rectangle 31"/>
-            <p:cNvSpPr/>
-            <p:nvPr/>
-          </p:nvSpPr>
-          <p:spPr>
-            <a:xfrm>
-              <a:off x="609600" y="5734050"/>
-              <a:ext cx="10972800" cy="704850"/>
-            </a:xfrm>
-            <a:prstGeom prst="roundRect">
-              <a:avLst>
-                <a:gd name="adj" fmla="val 16216"/>
-              </a:avLst>
-            </a:prstGeom>
-            <a:solidFill>
-              <a:srgbClr val="ECE5D9"/>
-            </a:solidFill>
-            <a:ln>
-              <a:noFill/>
-            </a:ln>
-          </p:spPr>
-        </p:sp>
-        <p:sp>
-          <p:nvSpPr>
-            <p:cNvPr id="32" name="TextBox 32"/>
-            <p:cNvSpPr/>
-            <p:nvPr/>
-          </p:nvSpPr>
-          <p:spPr>
-            <a:xfrm>
-              <a:off x="828294" y="5826157"/>
-              <a:ext cx="7391305" cy="381381"/>
-            </a:xfrm>
-            <a:prstGeom prst="rect">
-              <a:avLst/>
-            </a:prstGeom>
-            <a:noFill/>
-            <a:ln>
-              <a:noFill/>
-            </a:ln>
-          </p:spPr>
-          <p:txBody>
-            <a:bodyPr wrap="none" lIns="0" tIns="-32" rIns="0" bIns="0" anchor="t" anchorCtr="0">
-              <a:noAutofit/>
-            </a:bodyPr>
-            <a:lstStyle/>
-            <a:p>
-              <a:pPr algn="l"/>
-              <a:r>
-                <a:rPr lang="zh-TW" sz="1950" dirty="0" altLang="en-US">
-                  <a:solidFill>
-                    <a:srgbClr val="18344A"/>
-                  </a:solidFill>
-                  <a:latin typeface="Times New Roman"/>
-                  <a:ea typeface="標楷體"/>
-                  <a:cs typeface="Times New Roman"/>
-                </a:rPr>
-                <a:t>[1] 小樣本估計依據見第 39 頁；預測與實際結果仍需分開解讀。</a:t>
-              </a:r>
-            </a:p>
-          </p:txBody>
-        </p:sp>
-      </p:grpSp>
     </p:spTree>
   </p:cSld>
   <p:clrMapOvr>
@@ -4112,85 +4033,6 @@
                   <a:cs typeface="Times New Roman"/>
                 </a:rPr>
                 <a:t>非四位候選排名或成功率。</a:t>
-              </a:r>
-            </a:p>
-          </p:txBody>
-        </p:sp>
-      </p:grpSp>
-      <p:grpSp>
-        <p:nvGrpSpPr>
-          <p:cNvPr id="28" name="takeaway"/>
-          <p:cNvGrpSpPr/>
-          <p:nvPr/>
-        </p:nvGrpSpPr>
-        <p:grpSpPr>
-          <a:xfrm>
-            <a:off x="609600" y="5619750"/>
-            <a:ext cx="10972800" cy="704850"/>
-            <a:chOff x="609600" y="5619750"/>
-            <a:chExt cx="10972800" cy="704850"/>
-          </a:xfrm>
-        </p:grpSpPr>
-        <p:sp>
-          <p:nvSpPr>
-            <p:cNvPr id="26" name="Rectangle 26"/>
-            <p:cNvSpPr/>
-            <p:nvPr/>
-          </p:nvSpPr>
-          <p:spPr>
-            <a:xfrm>
-              <a:off x="609600" y="5619750"/>
-              <a:ext cx="10972800" cy="704850"/>
-            </a:xfrm>
-            <a:prstGeom prst="roundRect">
-              <a:avLst>
-                <a:gd name="adj" fmla="val 16216"/>
-              </a:avLst>
-            </a:prstGeom>
-            <a:solidFill>
-              <a:srgbClr val="ECE5D9"/>
-            </a:solidFill>
-            <a:ln>
-              <a:noFill/>
-            </a:ln>
-          </p:spPr>
-        </p:sp>
-        <p:sp>
-          <p:nvSpPr>
-            <p:cNvPr id="27" name="TextBox 27"/>
-            <p:cNvSpPr/>
-            <p:nvPr/>
-          </p:nvSpPr>
-          <p:spPr>
-            <a:xfrm>
-              <a:off x="828294" y="5711857"/>
-              <a:ext cx="6022848" cy="381381"/>
-            </a:xfrm>
-            <a:prstGeom prst="rect">
-              <a:avLst/>
-            </a:prstGeom>
-            <a:noFill/>
-            <a:ln>
-              <a:noFill/>
-            </a:ln>
-          </p:spPr>
-          <p:txBody>
-            <a:bodyPr wrap="none" lIns="0" tIns="-32" rIns="0" bIns="0" anchor="t" anchorCtr="0">
-              <a:noAutofit/>
-            </a:bodyPr>
-            <a:lstStyle/>
-            <a:p>
-              <a:pPr algn="l"/>
-              <a:r>
-                <a:rPr lang="zh-TW" sz="1950" dirty="0" altLang="en-US">
-                  <a:solidFill>
-                    <a:srgbClr val="18344A"/>
-                  </a:solidFill>
-                  <a:latin typeface="Times New Roman"/>
-                  <a:ea typeface="標楷體"/>
-                  <a:cs typeface="Times New Roman"/>
-                </a:rPr>
-                <a:t>逐球機率以 log loss 評估 [3]；方法依據見第 39 頁。</a:t>
               </a:r>
             </a:p>
           </p:txBody>
@@ -5044,85 +4886,6 @@
                   <a:cs typeface="Times New Roman"/>
                 </a:rPr>
                 <a:t>不能由操作測試推論效益。</a:t>
-              </a:r>
-            </a:p>
-          </p:txBody>
-        </p:sp>
-      </p:grpSp>
-      <p:grpSp>
-        <p:nvGrpSpPr>
-          <p:cNvPr id="24" name="takeaway"/>
-          <p:cNvGrpSpPr/>
-          <p:nvPr/>
-        </p:nvGrpSpPr>
-        <p:grpSpPr>
-          <a:xfrm>
-            <a:off x="609600" y="5695950"/>
-            <a:ext cx="10972800" cy="704850"/>
-            <a:chOff x="609600" y="5695950"/>
-            <a:chExt cx="10972800" cy="704850"/>
-          </a:xfrm>
-        </p:grpSpPr>
-        <p:sp>
-          <p:nvSpPr>
-            <p:cNvPr id="22" name="Rectangle 22"/>
-            <p:cNvSpPr/>
-            <p:nvPr/>
-          </p:nvSpPr>
-          <p:spPr>
-            <a:xfrm>
-              <a:off x="609600" y="5695950"/>
-              <a:ext cx="10972800" cy="704850"/>
-            </a:xfrm>
-            <a:prstGeom prst="roundRect">
-              <a:avLst>
-                <a:gd name="adj" fmla="val 16216"/>
-              </a:avLst>
-            </a:prstGeom>
-            <a:solidFill>
-              <a:srgbClr val="ECE5D9"/>
-            </a:solidFill>
-            <a:ln>
-              <a:noFill/>
-            </a:ln>
-          </p:spPr>
-        </p:sp>
-        <p:sp>
-          <p:nvSpPr>
-            <p:cNvPr id="23" name="TextBox 23"/>
-            <p:cNvSpPr txBox="1"/>
-            <p:nvPr/>
-          </p:nvSpPr>
-          <p:spPr>
-            <a:xfrm>
-              <a:off x="828294" y="5788025"/>
-              <a:ext cx="7895082" cy="381381"/>
-            </a:xfrm>
-            <a:prstGeom prst="rect">
-              <a:avLst/>
-            </a:prstGeom>
-            <a:noFill/>
-            <a:ln>
-              <a:noFill/>
-            </a:ln>
-          </p:spPr>
-          <p:txBody>
-            <a:bodyPr wrap="none" lIns="0" tIns="0" rIns="0" bIns="0" anchor="t" anchorCtr="0">
-              <a:spAutoFit/>
-            </a:bodyPr>
-            <a:lstStyle/>
-            <a:p>
-              <a:pPr algn="l"/>
-              <a:r>
-                <a:rPr lang="zh-TW" sz="1950" dirty="0" altLang="en-US">
-                  <a:solidFill>
-                    <a:srgbClr val="18344A"/>
-                  </a:solidFill>
-                  <a:latin typeface="Times New Roman"/>
-                  <a:ea typeface="標楷體"/>
-                  <a:cs typeface="Times New Roman"/>
-                </a:rPr>
-                <a:t>已有的驗收回答「有沒有算對、能不能操作」，不等同換人成功率。</a:t>
               </a:r>
             </a:p>
           </p:txBody>
@@ -7979,85 +7742,6 @@
           </p:txBody>
         </p:sp>
       </p:grpSp>
-      <p:grpSp>
-        <p:nvGrpSpPr>
-          <p:cNvPr id="25" name="takeaway"/>
-          <p:cNvGrpSpPr/>
-          <p:nvPr/>
-        </p:nvGrpSpPr>
-        <p:grpSpPr>
-          <a:xfrm>
-            <a:off x="609600" y="5638800"/>
-            <a:ext cx="10972800" cy="704850"/>
-            <a:chOff x="609600" y="5638800"/>
-            <a:chExt cx="10972800" cy="704850"/>
-          </a:xfrm>
-        </p:grpSpPr>
-        <p:sp>
-          <p:nvSpPr>
-            <p:cNvPr id="23" name="Rectangle 23"/>
-            <p:cNvSpPr/>
-            <p:nvPr/>
-          </p:nvSpPr>
-          <p:spPr>
-            <a:xfrm>
-              <a:off x="609600" y="5638800"/>
-              <a:ext cx="10972800" cy="704850"/>
-            </a:xfrm>
-            <a:prstGeom prst="roundRect">
-              <a:avLst>
-                <a:gd name="adj" fmla="val 16216"/>
-              </a:avLst>
-            </a:prstGeom>
-            <a:solidFill>
-              <a:srgbClr val="ECE5D9"/>
-            </a:solidFill>
-            <a:ln>
-              <a:noFill/>
-            </a:ln>
-          </p:spPr>
-        </p:sp>
-        <p:sp>
-          <p:nvSpPr>
-            <p:cNvPr id="24" name="TextBox 24"/>
-            <p:cNvSpPr/>
-            <p:nvPr/>
-          </p:nvSpPr>
-          <p:spPr>
-            <a:xfrm>
-              <a:off x="828294" y="5730907"/>
-              <a:ext cx="8009001" cy="381381"/>
-            </a:xfrm>
-            <a:prstGeom prst="rect">
-              <a:avLst/>
-            </a:prstGeom>
-            <a:noFill/>
-            <a:ln>
-              <a:noFill/>
-            </a:ln>
-          </p:spPr>
-          <p:txBody>
-            <a:bodyPr wrap="none" lIns="0" tIns="-32" rIns="0" bIns="0" anchor="t" anchorCtr="0">
-              <a:noAutofit/>
-            </a:bodyPr>
-            <a:lstStyle/>
-            <a:p>
-              <a:pPr algn="l"/>
-              <a:r>
-                <a:rPr lang="zh-TW" sz="1950" dirty="0" altLang="en-US">
-                  <a:solidFill>
-                    <a:srgbClr val="18344A"/>
-                  </a:solidFill>
-                  <a:latin typeface="Times New Roman"/>
-                  <a:ea typeface="標楷體"/>
-                  <a:cs typeface="Times New Roman"/>
-                </a:rPr>
-                <a:t>球隊模式依已套用配置限制現任；兩種使用方式皆可另開單日分析。</a:t>
-              </a:r>
-            </a:p>
-          </p:txBody>
-        </p:sp>
-      </p:grpSp>
     </p:spTree>
   </p:cSld>
   <p:clrMapOvr>
@@ -8648,110 +8332,6 @@
                   <a:cs typeface="Times New Roman"/>
                 </a:rPr>
                 <a:t>左打，指定打擊</a:t>
-              </a:r>
-            </a:p>
-          </p:txBody>
-        </p:sp>
-      </p:grpSp>
-      <p:grpSp>
-        <p:nvGrpSpPr>
-          <p:cNvPr id="21" name="takeaway"/>
-          <p:cNvGrpSpPr/>
-          <p:nvPr/>
-        </p:nvGrpSpPr>
-        <p:grpSpPr>
-          <a:xfrm>
-            <a:off x="609600" y="5095875"/>
-            <a:ext cx="10972800" cy="1028700"/>
-            <a:chOff x="609600" y="5095875"/>
-            <a:chExt cx="10972800" cy="1028700"/>
-          </a:xfrm>
-        </p:grpSpPr>
-        <p:sp>
-          <p:nvSpPr>
-            <p:cNvPr id="19" name="Rectangle 19"/>
-            <p:cNvSpPr/>
-            <p:nvPr/>
-          </p:nvSpPr>
-          <p:spPr>
-            <a:xfrm>
-              <a:off x="609600" y="5095875"/>
-              <a:ext cx="10972800" cy="1028700"/>
-            </a:xfrm>
-            <a:prstGeom prst="roundRect">
-              <a:avLst>
-                <a:gd name="adj" fmla="val 11111"/>
-              </a:avLst>
-            </a:prstGeom>
-            <a:solidFill>
-              <a:srgbClr val="ECE5D9"/>
-            </a:solidFill>
-            <a:ln>
-              <a:noFill/>
-            </a:ln>
-          </p:spPr>
-        </p:sp>
-        <p:sp>
-          <p:nvSpPr>
-            <p:cNvPr id="20" name="TextBox 20"/>
-            <p:cNvSpPr txBox="1"/>
-            <p:nvPr/>
-          </p:nvSpPr>
-          <p:spPr>
-            <a:xfrm>
-              <a:off x="828294" y="5162550"/>
-              <a:ext cx="6706362" cy="740474"/>
-            </a:xfrm>
-            <a:prstGeom prst="rect">
-              <a:avLst/>
-            </a:prstGeom>
-            <a:noFill/>
-            <a:ln>
-              <a:noFill/>
-            </a:ln>
-          </p:spPr>
-          <p:txBody>
-            <a:bodyPr wrap="none" lIns="0" tIns="0" rIns="0" bIns="0" anchor="t" anchorCtr="0">
-              <a:spAutoFit/>
-            </a:bodyPr>
-            <a:lstStyle/>
-            <a:p>
-              <a:pPr algn="l">
-                <a:lnSpc>
-                  <a:spcPts val="2828"/>
-                </a:lnSpc>
-              </a:pPr>
-              <a:r>
-                <a:rPr lang="zh-TW" sz="1950" dirty="0" altLang="en-US">
-                  <a:solidFill>
-                    <a:srgbClr val="18344A"/>
-                  </a:solidFill>
-                  <a:latin typeface="Times New Roman"/>
-                  <a:ea typeface="標楷體"/>
-                  <a:cs typeface="Times New Roman"/>
-                </a:rPr>
-                <a:t>只改候選：林佳緯續打，或由胡金龍／陳鏞基／楊竣翔代打。</a:t>
-              </a:r>
-              <a:br>
-                <a:rPr lang="zh-TW" sz="1950" dirty="0" altLang="en-US">
-                  <a:solidFill>
-                    <a:srgbClr val="18344A"/>
-                  </a:solidFill>
-                  <a:latin typeface="Times New Roman"/>
-                  <a:ea typeface="標楷體"/>
-                  <a:cs typeface="Times New Roman"/>
-                </a:rPr>
-              </a:br>
-              <a:r>
-                <a:rPr lang="zh-TW" sz="1950" dirty="0" altLang="en-US">
-                  <a:solidFill>
-                    <a:srgbClr val="18344A"/>
-                  </a:solidFill>
-                  <a:latin typeface="Times New Roman"/>
-                  <a:ea typeface="標楷體"/>
-                  <a:cs typeface="Times New Roman"/>
-                </a:rPr>
-                <a:t>同一條件下的實際比較畫面見下一頁。</a:t>
               </a:r>
             </a:p>
           </p:txBody>
@@ -13386,61 +12966,6 @@
             </a:prstGeom>
           </p:spPr>
         </p:pic>
-      </p:grpSp>
-      <p:grpSp>
-        <p:nvGrpSpPr>
-          <p:cNvPr id="9" name="mix-reading"/>
-          <p:cNvGrpSpPr/>
-          <p:nvPr/>
-        </p:nvGrpSpPr>
-        <p:grpSpPr>
-          <a:xfrm>
-            <a:off x="601218" y="6283325"/>
-            <a:ext cx="6458331" cy="322707"/>
-            <a:chOff x="601218" y="6283325"/>
-            <a:chExt cx="6458331" cy="322707"/>
-          </a:xfrm>
-        </p:grpSpPr>
-        <p:sp>
-          <p:nvSpPr>
-            <p:cNvPr id="10" name="TextBox 7"/>
-            <p:cNvSpPr txBox="1"/>
-            <p:nvPr/>
-          </p:nvSpPr>
-          <p:spPr>
-            <a:xfrm>
-              <a:off x="601218" y="6283325"/>
-              <a:ext cx="6458331" cy="322707"/>
-            </a:xfrm>
-            <a:prstGeom prst="rect">
-              <a:avLst/>
-            </a:prstGeom>
-            <a:noFill/>
-            <a:ln>
-              <a:noFill/>
-            </a:ln>
-          </p:spPr>
-          <p:txBody>
-            <a:bodyPr wrap="none" lIns="0" tIns="0" rIns="0" bIns="0" anchor="t" anchorCtr="0">
-              <a:spAutoFit/>
-            </a:bodyPr>
-            <a:lstStyle/>
-            <a:p>
-              <a:pPr algn="l"/>
-              <a:r>
-                <a:rPr lang="zh-TW" sz="1650" dirty="0" altLang="en-US">
-                  <a:solidFill>
-                    <a:srgbClr val="18344A"/>
-                  </a:solidFill>
-                  <a:latin typeface="Times New Roman"/>
-                  <a:ea typeface="標楷體"/>
-                  <a:cs typeface="Times New Roman"/>
-                </a:rPr>
-                <a:t>先看比例與樣本，再看區間；配球變化只作描述，不改推薦分數。</a:t>
-              </a:r>
-            </a:p>
-          </p:txBody>
-        </p:sp>
       </p:grpSp>
     </p:spTree>
   </p:cSld>
@@ -17543,85 +17068,6 @@
                   <a:cs typeface="Times New Roman"/>
                 </a:rPr>
                 <a:t>留意模型分歧與資料量。</a:t>
-              </a:r>
-            </a:p>
-          </p:txBody>
-        </p:sp>
-      </p:grpSp>
-      <p:grpSp>
-        <p:nvGrpSpPr>
-          <p:cNvPr id="21" name="takeaway"/>
-          <p:cNvGrpSpPr/>
-          <p:nvPr/>
-        </p:nvGrpSpPr>
-        <p:grpSpPr>
-          <a:xfrm>
-            <a:off x="609600" y="5610225"/>
-            <a:ext cx="10972800" cy="704850"/>
-            <a:chOff x="609600" y="5610225"/>
-            <a:chExt cx="10972800" cy="704850"/>
-          </a:xfrm>
-        </p:grpSpPr>
-        <p:sp>
-          <p:nvSpPr>
-            <p:cNvPr id="19" name="Rectangle 19"/>
-            <p:cNvSpPr/>
-            <p:nvPr/>
-          </p:nvSpPr>
-          <p:spPr>
-            <a:xfrm>
-              <a:off x="609600" y="5610225"/>
-              <a:ext cx="10972800" cy="704850"/>
-            </a:xfrm>
-            <a:prstGeom prst="roundRect">
-              <a:avLst>
-                <a:gd name="adj" fmla="val 16216"/>
-              </a:avLst>
-            </a:prstGeom>
-            <a:solidFill>
-              <a:srgbClr val="ECE5D9"/>
-            </a:solidFill>
-            <a:ln>
-              <a:noFill/>
-            </a:ln>
-          </p:spPr>
-        </p:sp>
-        <p:sp>
-          <p:nvSpPr>
-            <p:cNvPr id="20" name="TextBox 20"/>
-            <p:cNvSpPr/>
-            <p:nvPr/>
-          </p:nvSpPr>
-          <p:spPr>
-            <a:xfrm>
-              <a:off x="828294" y="5702332"/>
-              <a:ext cx="6057519" cy="381381"/>
-            </a:xfrm>
-            <a:prstGeom prst="rect">
-              <a:avLst/>
-            </a:prstGeom>
-            <a:noFill/>
-            <a:ln>
-              <a:noFill/>
-            </a:ln>
-          </p:spPr>
-          <p:txBody>
-            <a:bodyPr wrap="none" lIns="0" tIns="-32" rIns="0" bIns="0" anchor="t" anchorCtr="0">
-              <a:noAutofit/>
-            </a:bodyPr>
-            <a:lstStyle/>
-            <a:p>
-              <a:pPr algn="l"/>
-              <a:r>
-                <a:rPr lang="zh-TW" sz="1950" dirty="0" altLang="en-US">
-                  <a:solidFill>
-                    <a:srgbClr val="18344A"/>
-                  </a:solidFill>
-                  <a:latin typeface="Times New Roman"/>
-                  <a:ea typeface="標楷體"/>
-                  <a:cs typeface="Times New Roman"/>
-                </a:rPr>
-                <a:t>確認今日可用與接守；分數不能代替現場判斷。</a:t>
               </a:r>
             </a:p>
           </p:txBody>
@@ -19544,85 +18990,6 @@
                   <a:cs typeface="Times New Roman"/>
                 </a:rPr>
                 <a:t>回放涵蓋量不是預測準確率。</a:t>
-              </a:r>
-            </a:p>
-          </p:txBody>
-        </p:sp>
-      </p:grpSp>
-      <p:grpSp>
-        <p:nvGrpSpPr>
-          <p:cNvPr id="21" name="takeaway"/>
-          <p:cNvGrpSpPr/>
-          <p:nvPr/>
-        </p:nvGrpSpPr>
-        <p:grpSpPr>
-          <a:xfrm>
-            <a:off x="609600" y="5600700"/>
-            <a:ext cx="10972800" cy="704850"/>
-            <a:chOff x="609600" y="5600700"/>
-            <a:chExt cx="10972800" cy="704850"/>
-          </a:xfrm>
-        </p:grpSpPr>
-        <p:sp>
-          <p:nvSpPr>
-            <p:cNvPr id="19" name="Rectangle 19"/>
-            <p:cNvSpPr/>
-            <p:nvPr/>
-          </p:nvSpPr>
-          <p:spPr>
-            <a:xfrm>
-              <a:off x="609600" y="5600700"/>
-              <a:ext cx="10972800" cy="704850"/>
-            </a:xfrm>
-            <a:prstGeom prst="roundRect">
-              <a:avLst>
-                <a:gd name="adj" fmla="val 16216"/>
-              </a:avLst>
-            </a:prstGeom>
-            <a:solidFill>
-              <a:srgbClr val="ECE5D9"/>
-            </a:solidFill>
-            <a:ln>
-              <a:noFill/>
-            </a:ln>
-          </p:spPr>
-        </p:sp>
-        <p:sp>
-          <p:nvSpPr>
-            <p:cNvPr id="20" name="TextBox 20"/>
-            <p:cNvSpPr txBox="1"/>
-            <p:nvPr/>
-          </p:nvSpPr>
-          <p:spPr>
-            <a:xfrm>
-              <a:off x="828294" y="5692775"/>
-              <a:ext cx="8682609" cy="381381"/>
-            </a:xfrm>
-            <a:prstGeom prst="rect">
-              <a:avLst/>
-            </a:prstGeom>
-            <a:noFill/>
-            <a:ln>
-              <a:noFill/>
-            </a:ln>
-          </p:spPr>
-          <p:txBody>
-            <a:bodyPr wrap="none" lIns="0" tIns="0" rIns="0" bIns="0" anchor="t" anchorCtr="0">
-              <a:spAutoFit/>
-            </a:bodyPr>
-            <a:lstStyle/>
-            <a:p>
-              <a:pPr algn="l"/>
-              <a:r>
-                <a:rPr lang="zh-TW" sz="1950" dirty="0" altLang="en-US">
-                  <a:solidFill>
-                    <a:srgbClr val="18344A"/>
-                  </a:solidFill>
-                  <a:latin typeface="Times New Roman"/>
-                  <a:ea typeface="標楷體"/>
-                  <a:cs typeface="Times New Roman"/>
-                </a:rPr>
-                <a:t>後續驗收：真人能否讀懂差距與限制、完成任務，以及在哪些步驟誤操作。</a:t>
               </a:r>
             </a:p>
           </p:txBody>
